--- a/deck/C_FreshBox_The_Model_Build.pptx
+++ b/deck/C_FreshBox_The_Model_Build.pptx
@@ -18313,7 +18313,7 @@
             </p:custDataLst>
             <p:extLst>
               <p:ext uri="{D42A27DB-BD31-4B8C-83A1-F6EECF244321}">
-                <p14:modId xmlns:p14="http://schemas.microsoft.com/office/powerpoint/2010/main" val="3237956506"/>
+                <p14:modId xmlns:p14="http://schemas.microsoft.com/office/powerpoint/2010/main" val="4152672168"/>
               </p:ext>
             </p:extLst>
           </p:nvPr>
@@ -18789,7 +18789,7 @@
                           <a:ea typeface="Calibri" pitchFamily="34" charset="-122"/>
                           <a:cs typeface="Calibri" pitchFamily="34" charset="-120"/>
                         </a:rPr>
-                        <a:t>200-300</a:t>
+                        <a:t>2,000-3,000</a:t>
                       </a:r>
                       <a:endParaRPr lang="en-US" sz="1000" dirty="0">
                         <a:latin typeface="Calibri" charset="0"/>
@@ -18857,7 +18857,7 @@
                           <a:ea typeface="Calibri" pitchFamily="34" charset="-122"/>
                           <a:cs typeface="Calibri" pitchFamily="34" charset="-120"/>
                         </a:rPr>
-                        <a:t>£80-120K</a:t>
+                        <a:t>£0.8m-1.2m</a:t>
                       </a:r>
                       <a:endParaRPr lang="en-US" sz="1000" dirty="0">
                         <a:latin typeface="Calibri" charset="0"/>
@@ -19068,7 +19068,7 @@
                           <a:ea typeface="Calibri" pitchFamily="34" charset="-122"/>
                           <a:cs typeface="Calibri" pitchFamily="34" charset="-120"/>
                         </a:rPr>
-                        <a:t>250-400</a:t>
+                        <a:t>2,500-4,000</a:t>
                       </a:r>
                       <a:endParaRPr lang="en-US" sz="1000" dirty="0">
                         <a:latin typeface="Calibri" charset="0"/>
@@ -19136,7 +19136,7 @@
                           <a:ea typeface="Calibri" pitchFamily="34" charset="-122"/>
                           <a:cs typeface="Calibri" pitchFamily="34" charset="-120"/>
                         </a:rPr>
-                        <a:t>£100-160K</a:t>
+                        <a:t>£1.0m-1.0m</a:t>
                       </a:r>
                       <a:endParaRPr lang="en-US" sz="1000" dirty="0">
                         <a:latin typeface="Calibri" charset="0"/>
@@ -19300,7 +19300,7 @@
                   <a:ea typeface="Calibri Light" pitchFamily="34" charset="-122"/>
                   <a:cs typeface="Calibri Light" pitchFamily="34" charset="-120"/>
                 </a:rPr>
-                <a:t>200-300 customers saved × £400 = </a:t>
+                <a:t>2,000-3,000 customers saved × £400 = </a:t>
               </a:r>
               <a:r>
                 <a:rPr lang="en-US" sz="1600" b="1" dirty="0">
@@ -19311,7 +19311,7 @@
                   <a:ea typeface="Calibri" pitchFamily="34" charset="-122"/>
                   <a:cs typeface="Calibri" pitchFamily="34" charset="-120"/>
                 </a:rPr>
-                <a:t>£80-120K </a:t>
+                <a:t>£0.8m-1.2m </a:t>
               </a:r>
               <a:r>
                 <a:rPr lang="en-US" sz="1200" dirty="0">
